--- a/assets/images_papers/papers_ckntav_template.pptx
+++ b/assets/images_papers/papers_ckntav_template.pptx
@@ -9,7 +9,7 @@
   </p:notesMasterIdLst>
   <p:sldIdLst>
     <p:sldId id="264" r:id="rId2"/>
-    <p:sldId id="265" r:id="rId3"/>
+    <p:sldId id="266" r:id="rId3"/>
   </p:sldIdLst>
   <p:sldSz cx="7775575" cy="10044113"/>
   <p:notesSz cx="6858000" cy="9144000"/>
@@ -198,7 +198,7 @@
           <a:p>
             <a:fld id="{B412DFD0-D537-B343-9972-2F88FB06FE28}" type="datetimeFigureOut">
               <a:rPr lang="fr-FR" smtClean="0"/>
-              <a:t>13/06/2024</a:t>
+              <a:t>14/06/2024</a:t>
             </a:fld>
             <a:endParaRPr lang="fr-FR"/>
           </a:p>
@@ -597,7 +597,7 @@
           <a:p>
             <a:fld id="{FD61F8CB-2676-0E4E-997A-93DE7A441BDD}" type="datetimeFigureOut">
               <a:rPr lang="fr-FR" smtClean="0"/>
-              <a:t>13/06/2024</a:t>
+              <a:t>14/06/2024</a:t>
             </a:fld>
             <a:endParaRPr lang="fr-FR"/>
           </a:p>
@@ -767,7 +767,7 @@
           <a:p>
             <a:fld id="{FD61F8CB-2676-0E4E-997A-93DE7A441BDD}" type="datetimeFigureOut">
               <a:rPr lang="fr-FR" smtClean="0"/>
-              <a:t>13/06/2024</a:t>
+              <a:t>14/06/2024</a:t>
             </a:fld>
             <a:endParaRPr lang="fr-FR"/>
           </a:p>
@@ -947,7 +947,7 @@
           <a:p>
             <a:fld id="{FD61F8CB-2676-0E4E-997A-93DE7A441BDD}" type="datetimeFigureOut">
               <a:rPr lang="fr-FR" smtClean="0"/>
-              <a:t>13/06/2024</a:t>
+              <a:t>14/06/2024</a:t>
             </a:fld>
             <a:endParaRPr lang="fr-FR"/>
           </a:p>
@@ -1117,7 +1117,7 @@
           <a:p>
             <a:fld id="{FD61F8CB-2676-0E4E-997A-93DE7A441BDD}" type="datetimeFigureOut">
               <a:rPr lang="fr-FR" smtClean="0"/>
-              <a:t>13/06/2024</a:t>
+              <a:t>14/06/2024</a:t>
             </a:fld>
             <a:endParaRPr lang="fr-FR"/>
           </a:p>
@@ -1363,7 +1363,7 @@
           <a:p>
             <a:fld id="{FD61F8CB-2676-0E4E-997A-93DE7A441BDD}" type="datetimeFigureOut">
               <a:rPr lang="fr-FR" smtClean="0"/>
-              <a:t>13/06/2024</a:t>
+              <a:t>14/06/2024</a:t>
             </a:fld>
             <a:endParaRPr lang="fr-FR"/>
           </a:p>
@@ -1595,7 +1595,7 @@
           <a:p>
             <a:fld id="{FD61F8CB-2676-0E4E-997A-93DE7A441BDD}" type="datetimeFigureOut">
               <a:rPr lang="fr-FR" smtClean="0"/>
-              <a:t>13/06/2024</a:t>
+              <a:t>14/06/2024</a:t>
             </a:fld>
             <a:endParaRPr lang="fr-FR"/>
           </a:p>
@@ -1962,7 +1962,7 @@
           <a:p>
             <a:fld id="{FD61F8CB-2676-0E4E-997A-93DE7A441BDD}" type="datetimeFigureOut">
               <a:rPr lang="fr-FR" smtClean="0"/>
-              <a:t>13/06/2024</a:t>
+              <a:t>14/06/2024</a:t>
             </a:fld>
             <a:endParaRPr lang="fr-FR"/>
           </a:p>
@@ -2080,7 +2080,7 @@
           <a:p>
             <a:fld id="{FD61F8CB-2676-0E4E-997A-93DE7A441BDD}" type="datetimeFigureOut">
               <a:rPr lang="fr-FR" smtClean="0"/>
-              <a:t>13/06/2024</a:t>
+              <a:t>14/06/2024</a:t>
             </a:fld>
             <a:endParaRPr lang="fr-FR"/>
           </a:p>
@@ -2175,7 +2175,7 @@
           <a:p>
             <a:fld id="{FD61F8CB-2676-0E4E-997A-93DE7A441BDD}" type="datetimeFigureOut">
               <a:rPr lang="fr-FR" smtClean="0"/>
-              <a:t>13/06/2024</a:t>
+              <a:t>14/06/2024</a:t>
             </a:fld>
             <a:endParaRPr lang="fr-FR"/>
           </a:p>
@@ -2452,7 +2452,7 @@
           <a:p>
             <a:fld id="{FD61F8CB-2676-0E4E-997A-93DE7A441BDD}" type="datetimeFigureOut">
               <a:rPr lang="fr-FR" smtClean="0"/>
-              <a:t>13/06/2024</a:t>
+              <a:t>14/06/2024</a:t>
             </a:fld>
             <a:endParaRPr lang="fr-FR"/>
           </a:p>
@@ -2709,7 +2709,7 @@
           <a:p>
             <a:fld id="{FD61F8CB-2676-0E4E-997A-93DE7A441BDD}" type="datetimeFigureOut">
               <a:rPr lang="fr-FR" smtClean="0"/>
-              <a:t>13/06/2024</a:t>
+              <a:t>14/06/2024</a:t>
             </a:fld>
             <a:endParaRPr lang="fr-FR"/>
           </a:p>
@@ -2922,7 +2922,7 @@
           <a:p>
             <a:fld id="{FD61F8CB-2676-0E4E-997A-93DE7A441BDD}" type="datetimeFigureOut">
               <a:rPr lang="fr-FR" smtClean="0"/>
-              <a:t>13/06/2024</a:t>
+              <a:t>14/06/2024</a:t>
             </a:fld>
             <a:endParaRPr lang="fr-FR"/>
           </a:p>
@@ -3523,7 +3523,7 @@
     </p:spTree>
     <p:extLst>
       <p:ext uri="{BB962C8B-B14F-4D97-AF65-F5344CB8AC3E}">
-        <p14:creationId xmlns:p14="http://schemas.microsoft.com/office/powerpoint/2010/main" val="4210480540"/>
+        <p14:creationId xmlns:p14="http://schemas.microsoft.com/office/powerpoint/2010/main" val="3706284312"/>
       </p:ext>
     </p:extLst>
   </p:cSld>

--- a/assets/images_papers/papers_ckntav_template.pptx
+++ b/assets/images_papers/papers_ckntav_template.pptx
@@ -5,11 +5,12 @@
     <p:sldMasterId id="2147483744" r:id="rId1"/>
   </p:sldMasterIdLst>
   <p:notesMasterIdLst>
-    <p:notesMasterId r:id="rId4"/>
+    <p:notesMasterId r:id="rId5"/>
   </p:notesMasterIdLst>
   <p:sldIdLst>
     <p:sldId id="264" r:id="rId2"/>
     <p:sldId id="266" r:id="rId3"/>
+    <p:sldId id="267" r:id="rId4"/>
   </p:sldIdLst>
   <p:sldSz cx="7775575" cy="10044113"/>
   <p:notesSz cx="6858000" cy="9144000"/>
@@ -198,7 +199,7 @@
           <a:p>
             <a:fld id="{B412DFD0-D537-B343-9972-2F88FB06FE28}" type="datetimeFigureOut">
               <a:rPr lang="fr-FR" smtClean="0"/>
-              <a:t>14/06/2024</a:t>
+              <a:t>28/06/2024</a:t>
             </a:fld>
             <a:endParaRPr lang="fr-FR"/>
           </a:p>
@@ -597,7 +598,7 @@
           <a:p>
             <a:fld id="{FD61F8CB-2676-0E4E-997A-93DE7A441BDD}" type="datetimeFigureOut">
               <a:rPr lang="fr-FR" smtClean="0"/>
-              <a:t>14/06/2024</a:t>
+              <a:t>28/06/2024</a:t>
             </a:fld>
             <a:endParaRPr lang="fr-FR"/>
           </a:p>
@@ -767,7 +768,7 @@
           <a:p>
             <a:fld id="{FD61F8CB-2676-0E4E-997A-93DE7A441BDD}" type="datetimeFigureOut">
               <a:rPr lang="fr-FR" smtClean="0"/>
-              <a:t>14/06/2024</a:t>
+              <a:t>28/06/2024</a:t>
             </a:fld>
             <a:endParaRPr lang="fr-FR"/>
           </a:p>
@@ -947,7 +948,7 @@
           <a:p>
             <a:fld id="{FD61F8CB-2676-0E4E-997A-93DE7A441BDD}" type="datetimeFigureOut">
               <a:rPr lang="fr-FR" smtClean="0"/>
-              <a:t>14/06/2024</a:t>
+              <a:t>28/06/2024</a:t>
             </a:fld>
             <a:endParaRPr lang="fr-FR"/>
           </a:p>
@@ -1117,7 +1118,7 @@
           <a:p>
             <a:fld id="{FD61F8CB-2676-0E4E-997A-93DE7A441BDD}" type="datetimeFigureOut">
               <a:rPr lang="fr-FR" smtClean="0"/>
-              <a:t>14/06/2024</a:t>
+              <a:t>28/06/2024</a:t>
             </a:fld>
             <a:endParaRPr lang="fr-FR"/>
           </a:p>
@@ -1363,7 +1364,7 @@
           <a:p>
             <a:fld id="{FD61F8CB-2676-0E4E-997A-93DE7A441BDD}" type="datetimeFigureOut">
               <a:rPr lang="fr-FR" smtClean="0"/>
-              <a:t>14/06/2024</a:t>
+              <a:t>28/06/2024</a:t>
             </a:fld>
             <a:endParaRPr lang="fr-FR"/>
           </a:p>
@@ -1595,7 +1596,7 @@
           <a:p>
             <a:fld id="{FD61F8CB-2676-0E4E-997A-93DE7A441BDD}" type="datetimeFigureOut">
               <a:rPr lang="fr-FR" smtClean="0"/>
-              <a:t>14/06/2024</a:t>
+              <a:t>28/06/2024</a:t>
             </a:fld>
             <a:endParaRPr lang="fr-FR"/>
           </a:p>
@@ -1962,7 +1963,7 @@
           <a:p>
             <a:fld id="{FD61F8CB-2676-0E4E-997A-93DE7A441BDD}" type="datetimeFigureOut">
               <a:rPr lang="fr-FR" smtClean="0"/>
-              <a:t>14/06/2024</a:t>
+              <a:t>28/06/2024</a:t>
             </a:fld>
             <a:endParaRPr lang="fr-FR"/>
           </a:p>
@@ -2080,7 +2081,7 @@
           <a:p>
             <a:fld id="{FD61F8CB-2676-0E4E-997A-93DE7A441BDD}" type="datetimeFigureOut">
               <a:rPr lang="fr-FR" smtClean="0"/>
-              <a:t>14/06/2024</a:t>
+              <a:t>28/06/2024</a:t>
             </a:fld>
             <a:endParaRPr lang="fr-FR"/>
           </a:p>
@@ -2175,7 +2176,7 @@
           <a:p>
             <a:fld id="{FD61F8CB-2676-0E4E-997A-93DE7A441BDD}" type="datetimeFigureOut">
               <a:rPr lang="fr-FR" smtClean="0"/>
-              <a:t>14/06/2024</a:t>
+              <a:t>28/06/2024</a:t>
             </a:fld>
             <a:endParaRPr lang="fr-FR"/>
           </a:p>
@@ -2452,7 +2453,7 @@
           <a:p>
             <a:fld id="{FD61F8CB-2676-0E4E-997A-93DE7A441BDD}" type="datetimeFigureOut">
               <a:rPr lang="fr-FR" smtClean="0"/>
-              <a:t>14/06/2024</a:t>
+              <a:t>28/06/2024</a:t>
             </a:fld>
             <a:endParaRPr lang="fr-FR"/>
           </a:p>
@@ -2709,7 +2710,7 @@
           <a:p>
             <a:fld id="{FD61F8CB-2676-0E4E-997A-93DE7A441BDD}" type="datetimeFigureOut">
               <a:rPr lang="fr-FR" smtClean="0"/>
-              <a:t>14/06/2024</a:t>
+              <a:t>28/06/2024</a:t>
             </a:fld>
             <a:endParaRPr lang="fr-FR"/>
           </a:p>
@@ -2922,7 +2923,7 @@
           <a:p>
             <a:fld id="{FD61F8CB-2676-0E4E-997A-93DE7A441BDD}" type="datetimeFigureOut">
               <a:rPr lang="fr-FR" smtClean="0"/>
-              <a:t>14/06/2024</a:t>
+              <a:t>28/06/2024</a:t>
             </a:fld>
             <a:endParaRPr lang="fr-FR"/>
           </a:p>
@@ -3464,6 +3465,162 @@
           <a:chExt cx="0" cy="0"/>
         </a:xfrm>
       </p:grpSpPr>
+      <p:grpSp>
+        <p:nvGrpSpPr>
+          <p:cNvPr id="3" name="Groupe 2">
+            <a:extLst>
+              <a:ext uri="{FF2B5EF4-FFF2-40B4-BE49-F238E27FC236}">
+                <a16:creationId xmlns:a16="http://schemas.microsoft.com/office/drawing/2014/main" id="{8563CDD2-E69D-FE78-54B1-AEF64E6A3E19}"/>
+              </a:ext>
+            </a:extLst>
+          </p:cNvPr>
+          <p:cNvGrpSpPr/>
+          <p:nvPr/>
+        </p:nvGrpSpPr>
+        <p:grpSpPr>
+          <a:xfrm>
+            <a:off x="60784" y="-80616"/>
+            <a:ext cx="7654007" cy="10205343"/>
+            <a:chOff x="60784" y="-80616"/>
+            <a:chExt cx="7654007" cy="10205343"/>
+          </a:xfrm>
+        </p:grpSpPr>
+        <p:sp>
+          <p:nvSpPr>
+            <p:cNvPr id="4" name="Rectangle 3">
+              <a:extLst>
+                <a:ext uri="{FF2B5EF4-FFF2-40B4-BE49-F238E27FC236}">
+                  <a16:creationId xmlns:a16="http://schemas.microsoft.com/office/drawing/2014/main" id="{869730D9-934E-2E91-1475-28F2DCB0330C}"/>
+                </a:ext>
+              </a:extLst>
+            </p:cNvPr>
+            <p:cNvSpPr/>
+            <p:nvPr/>
+          </p:nvSpPr>
+          <p:spPr>
+            <a:xfrm>
+              <a:off x="60784" y="-80616"/>
+              <a:ext cx="7654007" cy="10205343"/>
+            </a:xfrm>
+            <a:prstGeom prst="rect">
+              <a:avLst/>
+            </a:prstGeom>
+            <a:solidFill>
+              <a:schemeClr val="bg1"/>
+            </a:solidFill>
+            <a:ln>
+              <a:noFill/>
+            </a:ln>
+          </p:spPr>
+          <p:style>
+            <a:lnRef idx="2">
+              <a:schemeClr val="accent1">
+                <a:shade val="15000"/>
+              </a:schemeClr>
+            </a:lnRef>
+            <a:fillRef idx="1">
+              <a:schemeClr val="accent1"/>
+            </a:fillRef>
+            <a:effectRef idx="0">
+              <a:schemeClr val="accent1"/>
+            </a:effectRef>
+            <a:fontRef idx="minor">
+              <a:schemeClr val="lt1"/>
+            </a:fontRef>
+          </p:style>
+          <p:txBody>
+            <a:bodyPr rtlCol="0" anchor="ctr"/>
+            <a:lstStyle/>
+            <a:p>
+              <a:pPr algn="ctr"/>
+              <a:endParaRPr lang="fr-FR" sz="2009">
+                <a:solidFill>
+                  <a:schemeClr val="bg1"/>
+                </a:solidFill>
+              </a:endParaRPr>
+            </a:p>
+          </p:txBody>
+        </p:sp>
+        <p:sp>
+          <p:nvSpPr>
+            <p:cNvPr id="2" name="ZoneTexte 1">
+              <a:extLst>
+                <a:ext uri="{FF2B5EF4-FFF2-40B4-BE49-F238E27FC236}">
+                  <a16:creationId xmlns:a16="http://schemas.microsoft.com/office/drawing/2014/main" id="{7F07950D-D4E5-5549-E844-B467DFCBD8C4}"/>
+                </a:ext>
+              </a:extLst>
+            </p:cNvPr>
+            <p:cNvSpPr txBox="1"/>
+            <p:nvPr/>
+          </p:nvSpPr>
+          <p:spPr>
+            <a:xfrm>
+              <a:off x="947623" y="3867893"/>
+              <a:ext cx="5880328" cy="2308324"/>
+            </a:xfrm>
+            <a:prstGeom prst="rect">
+              <a:avLst/>
+            </a:prstGeom>
+            <a:noFill/>
+          </p:spPr>
+          <p:txBody>
+            <a:bodyPr wrap="square" rtlCol="0">
+              <a:spAutoFit/>
+            </a:bodyPr>
+            <a:lstStyle/>
+            <a:p>
+              <a:pPr algn="r"/>
+              <a:r>
+                <a:rPr lang="fr-FR" sz="7200" b="1" dirty="0" err="1"/>
+                <a:t>manuscript</a:t>
+              </a:r>
+              <a:endParaRPr lang="fr-FR" sz="7200" b="1" dirty="0"/>
+            </a:p>
+            <a:p>
+              <a:pPr algn="r"/>
+              <a:r>
+                <a:rPr lang="fr-FR" sz="7200" i="1" dirty="0"/>
+                <a:t>in </a:t>
+              </a:r>
+              <a:r>
+                <a:rPr lang="fr-FR" sz="7200" i="1" dirty="0" err="1"/>
+                <a:t>preparation</a:t>
+              </a:r>
+              <a:endParaRPr lang="fr-FR" sz="7200" i="1" dirty="0"/>
+            </a:p>
+          </p:txBody>
+        </p:sp>
+      </p:grpSp>
+    </p:spTree>
+    <p:extLst>
+      <p:ext uri="{BB962C8B-B14F-4D97-AF65-F5344CB8AC3E}">
+        <p14:creationId xmlns:p14="http://schemas.microsoft.com/office/powerpoint/2010/main" val="3706284312"/>
+      </p:ext>
+    </p:extLst>
+  </p:cSld>
+  <p:clrMapOvr>
+    <a:masterClrMapping/>
+  </p:clrMapOvr>
+</p:sld>
+</file>
+
+<file path=ppt/slides/slide3.xml><?xml version="1.0" encoding="utf-8"?>
+<p:sld xmlns:a="http://schemas.openxmlformats.org/drawingml/2006/main" xmlns:r="http://schemas.openxmlformats.org/officeDocument/2006/relationships" xmlns:p="http://schemas.openxmlformats.org/presentationml/2006/main">
+  <p:cSld>
+    <p:spTree>
+      <p:nvGrpSpPr>
+        <p:cNvPr id="1" name=""/>
+        <p:cNvGrpSpPr/>
+        <p:nvPr/>
+      </p:nvGrpSpPr>
+      <p:grpSpPr>
+        <a:xfrm>
+          <a:off x="0" y="0"/>
+          <a:ext cx="0" cy="0"/>
+          <a:chOff x="0" y="0"/>
+          <a:chExt cx="0" cy="0"/>
+        </a:xfrm>
+      </p:grpSpPr>
       <p:sp>
         <p:nvSpPr>
           <p:cNvPr id="4" name="Rectangle 3">
@@ -3523,7 +3680,7 @@
     </p:spTree>
     <p:extLst>
       <p:ext uri="{BB962C8B-B14F-4D97-AF65-F5344CB8AC3E}">
-        <p14:creationId xmlns:p14="http://schemas.microsoft.com/office/powerpoint/2010/main" val="3706284312"/>
+        <p14:creationId xmlns:p14="http://schemas.microsoft.com/office/powerpoint/2010/main" val="314237225"/>
       </p:ext>
     </p:extLst>
   </p:cSld>
